--- a/Präsentation.pptx
+++ b/Präsentation.pptx
@@ -5,7 +5,7 @@
     <p:sldMasterId id="2147483718" r:id="rId1"/>
   </p:sldMasterIdLst>
   <p:notesMasterIdLst>
-    <p:notesMasterId r:id="rId7"/>
+    <p:notesMasterId r:id="rId8"/>
   </p:notesMasterIdLst>
   <p:sldIdLst>
     <p:sldId id="256" r:id="rId2"/>
@@ -13,6 +13,7 @@
     <p:sldId id="258" r:id="rId4"/>
     <p:sldId id="259" r:id="rId5"/>
     <p:sldId id="260" r:id="rId6"/>
+    <p:sldId id="261" r:id="rId7"/>
   </p:sldIdLst>
   <p:sldSz cx="12192000" cy="6858000"/>
   <p:notesSz cx="6858000" cy="9144000"/>
@@ -121,6 +122,7 @@
             <p14:sldId id="258"/>
             <p14:sldId id="259"/>
             <p14:sldId id="260"/>
+            <p14:sldId id="261"/>
           </p14:sldIdLst>
         </p14:section>
         <p14:section name="Mục Chưa có tên" id="{5779334A-D1D2-4AEF-AAA2-B06792B9ED5D}">
@@ -217,7 +219,7 @@
           <a:p>
             <a:fld id="{570113FD-592A-43CF-BE6E-B40D5C84287A}" type="datetimeFigureOut">
               <a:rPr lang="en-DE" smtClean="0"/>
-              <a:t>28/08/2026</a:t>
+              <a:t>30/08/2026</a:t>
             </a:fld>
             <a:endParaRPr lang="en-DE"/>
           </a:p>
@@ -1074,6 +1076,90 @@
             <a:endParaRPr lang="en-US" dirty="0"/>
           </a:p>
           <a:p>
+            <a:endParaRPr lang="en-DE" dirty="0"/>
+          </a:p>
+        </p:txBody>
+      </p:sp>
+      <p:sp>
+        <p:nvSpPr>
+          <p:cNvPr id="4" name="Chỗ dành sẵn cho Số hiệu Bản chiếu 3"/>
+          <p:cNvSpPr>
+            <a:spLocks noGrp="1"/>
+          </p:cNvSpPr>
+          <p:nvPr>
+            <p:ph type="sldNum" sz="quarter" idx="5"/>
+          </p:nvPr>
+        </p:nvSpPr>
+        <p:spPr/>
+        <p:txBody>
+          <a:bodyPr/>
+          <a:lstStyle/>
+          <a:p>
+            <a:fld id="{519AE445-AB8E-48CA-A252-FEEF88D3E391}" type="slidenum">
+              <a:rPr lang="en-DE" smtClean="0"/>
+              <a:t>5</a:t>
+            </a:fld>
+            <a:endParaRPr lang="en-DE"/>
+          </a:p>
+        </p:txBody>
+      </p:sp>
+    </p:spTree>
+    <p:extLst>
+      <p:ext uri="{BB962C8B-B14F-4D97-AF65-F5344CB8AC3E}">
+        <p14:creationId xmlns:p14="http://schemas.microsoft.com/office/powerpoint/2010/main" val="2444184131"/>
+      </p:ext>
+    </p:extLst>
+  </p:cSld>
+  <p:clrMapOvr>
+    <a:masterClrMapping/>
+  </p:clrMapOvr>
+</p:notes>
+</file>
+
+<file path=ppt/notesSlides/notesSlide5.xml><?xml version="1.0" encoding="utf-8"?>
+<p:notes xmlns:a="http://schemas.openxmlformats.org/drawingml/2006/main" xmlns:r="http://schemas.openxmlformats.org/officeDocument/2006/relationships" xmlns:p="http://schemas.openxmlformats.org/presentationml/2006/main">
+  <p:cSld>
+    <p:spTree>
+      <p:nvGrpSpPr>
+        <p:cNvPr id="1" name=""/>
+        <p:cNvGrpSpPr/>
+        <p:nvPr/>
+      </p:nvGrpSpPr>
+      <p:grpSpPr>
+        <a:xfrm>
+          <a:off x="0" y="0"/>
+          <a:ext cx="0" cy="0"/>
+          <a:chOff x="0" y="0"/>
+          <a:chExt cx="0" cy="0"/>
+        </a:xfrm>
+      </p:grpSpPr>
+      <p:sp>
+        <p:nvSpPr>
+          <p:cNvPr id="2" name="Chỗ dành sẵn cho Hình ảnh của Bản chiếu 1"/>
+          <p:cNvSpPr>
+            <a:spLocks noGrp="1" noRot="1" noChangeAspect="1"/>
+          </p:cNvSpPr>
+          <p:nvPr>
+            <p:ph type="sldImg"/>
+          </p:nvPr>
+        </p:nvSpPr>
+        <p:spPr/>
+      </p:sp>
+      <p:sp>
+        <p:nvSpPr>
+          <p:cNvPr id="3" name="Chỗ dành sẵn cho Ghi chú 2"/>
+          <p:cNvSpPr>
+            <a:spLocks noGrp="1"/>
+          </p:cNvSpPr>
+          <p:nvPr>
+            <p:ph type="body" idx="1"/>
+          </p:nvPr>
+        </p:nvSpPr>
+        <p:spPr/>
+        <p:txBody>
+          <a:bodyPr/>
+          <a:lstStyle/>
+          <a:p>
             <a:r>
               <a:rPr lang="en-DE" dirty="0"/>
               <a:t>The analysis identified four suitable areas with a total area of approximately </a:t>
@@ -1127,16 +1213,12 @@
               <a:t>. Very few</a:t>
             </a:r>
             <a:r>
-              <a:rPr lang="en-US"/>
+              <a:rPr lang="en-US" dirty="0"/>
               <a:t> </a:t>
             </a:r>
             <a:r>
-              <a:rPr lang="en-DE"/>
-              <a:t>suitable </a:t>
-            </a:r>
-            <a:r>
               <a:rPr lang="en-DE" dirty="0"/>
-              <a:t>areas remain in the central and eastern parts. This pattern can be explained by the high density of settlements, transport infrastructure, water bodies, and other protected features. Their overlapping buffer zones exclude a large proportion of the study area, which further reduces the number of feasible sites.</a:t>
+              <a:t>suitable areas remain in the central and eastern parts. This pattern can be explained by the high density of settlements, transport infrastructure, water bodies, and other protected features. Their overlapping buffer zones exclude a large proportion of the study area, which further reduces the number of feasible sites.</a:t>
             </a:r>
           </a:p>
           <a:p>
@@ -1161,7 +1243,7 @@
           <a:p>
             <a:fld id="{519AE445-AB8E-48CA-A252-FEEF88D3E391}" type="slidenum">
               <a:rPr lang="en-DE" smtClean="0"/>
-              <a:t>5</a:t>
+              <a:t>6</a:t>
             </a:fld>
             <a:endParaRPr lang="en-DE"/>
           </a:p>
@@ -1170,7 +1252,7 @@
     </p:spTree>
     <p:extLst>
       <p:ext uri="{BB962C8B-B14F-4D97-AF65-F5344CB8AC3E}">
-        <p14:creationId xmlns:p14="http://schemas.microsoft.com/office/powerpoint/2010/main" val="2444184131"/>
+        <p14:creationId xmlns:p14="http://schemas.microsoft.com/office/powerpoint/2010/main" val="1011738306"/>
       </p:ext>
     </p:extLst>
   </p:cSld>
@@ -1366,7 +1448,7 @@
           <a:p>
             <a:fld id="{C4CA1AAD-5839-46A8-A174-C22752ADA508}" type="datetimeFigureOut">
               <a:rPr lang="en-DE" smtClean="0"/>
-              <a:t>28/08/2026</a:t>
+              <a:t>30/08/2026</a:t>
             </a:fld>
             <a:endParaRPr lang="en-DE"/>
           </a:p>
@@ -1641,7 +1723,7 @@
           <a:p>
             <a:fld id="{C4CA1AAD-5839-46A8-A174-C22752ADA508}" type="datetimeFigureOut">
               <a:rPr lang="en-DE" smtClean="0"/>
-              <a:t>28/08/2026</a:t>
+              <a:t>30/08/2026</a:t>
             </a:fld>
             <a:endParaRPr lang="en-DE"/>
           </a:p>
@@ -1835,7 +1917,7 @@
           <a:p>
             <a:fld id="{C4CA1AAD-5839-46A8-A174-C22752ADA508}" type="datetimeFigureOut">
               <a:rPr lang="en-DE" smtClean="0"/>
-              <a:t>28/08/2026</a:t>
+              <a:t>30/08/2026</a:t>
             </a:fld>
             <a:endParaRPr lang="en-DE"/>
           </a:p>
@@ -2108,7 +2190,7 @@
           <a:p>
             <a:fld id="{C4CA1AAD-5839-46A8-A174-C22752ADA508}" type="datetimeFigureOut">
               <a:rPr lang="en-DE" smtClean="0"/>
-              <a:t>28/08/2026</a:t>
+              <a:t>30/08/2026</a:t>
             </a:fld>
             <a:endParaRPr lang="en-DE"/>
           </a:p>
@@ -2449,7 +2531,7 @@
           <a:p>
             <a:fld id="{C4CA1AAD-5839-46A8-A174-C22752ADA508}" type="datetimeFigureOut">
               <a:rPr lang="en-DE" smtClean="0"/>
-              <a:t>28/08/2026</a:t>
+              <a:t>30/08/2026</a:t>
             </a:fld>
             <a:endParaRPr lang="en-DE"/>
           </a:p>
@@ -3072,7 +3154,7 @@
           <a:p>
             <a:fld id="{C4CA1AAD-5839-46A8-A174-C22752ADA508}" type="datetimeFigureOut">
               <a:rPr lang="en-DE" smtClean="0"/>
-              <a:t>28/08/2026</a:t>
+              <a:t>30/08/2026</a:t>
             </a:fld>
             <a:endParaRPr lang="en-DE"/>
           </a:p>
@@ -3932,7 +4014,7 @@
           <a:p>
             <a:fld id="{C4CA1AAD-5839-46A8-A174-C22752ADA508}" type="datetimeFigureOut">
               <a:rPr lang="en-DE" smtClean="0"/>
-              <a:t>28/08/2026</a:t>
+              <a:t>30/08/2026</a:t>
             </a:fld>
             <a:endParaRPr lang="en-DE"/>
           </a:p>
@@ -4102,7 +4184,7 @@
           <a:p>
             <a:fld id="{C4CA1AAD-5839-46A8-A174-C22752ADA508}" type="datetimeFigureOut">
               <a:rPr lang="en-DE" smtClean="0"/>
-              <a:t>28/08/2026</a:t>
+              <a:t>30/08/2026</a:t>
             </a:fld>
             <a:endParaRPr lang="en-DE"/>
           </a:p>
@@ -4282,7 +4364,7 @@
           <a:p>
             <a:fld id="{C4CA1AAD-5839-46A8-A174-C22752ADA508}" type="datetimeFigureOut">
               <a:rPr lang="en-DE" smtClean="0"/>
-              <a:t>28/08/2026</a:t>
+              <a:t>30/08/2026</a:t>
             </a:fld>
             <a:endParaRPr lang="en-DE"/>
           </a:p>
@@ -4452,7 +4534,7 @@
           <a:p>
             <a:fld id="{C4CA1AAD-5839-46A8-A174-C22752ADA508}" type="datetimeFigureOut">
               <a:rPr lang="en-DE" smtClean="0"/>
-              <a:t>28/08/2026</a:t>
+              <a:t>30/08/2026</a:t>
             </a:fld>
             <a:endParaRPr lang="en-DE"/>
           </a:p>
@@ -4699,7 +4781,7 @@
           <a:p>
             <a:fld id="{C4CA1AAD-5839-46A8-A174-C22752ADA508}" type="datetimeFigureOut">
               <a:rPr lang="en-DE" smtClean="0"/>
-              <a:t>28/08/2026</a:t>
+              <a:t>30/08/2026</a:t>
             </a:fld>
             <a:endParaRPr lang="en-DE"/>
           </a:p>
@@ -4991,7 +5073,7 @@
           <a:p>
             <a:fld id="{C4CA1AAD-5839-46A8-A174-C22752ADA508}" type="datetimeFigureOut">
               <a:rPr lang="en-DE" smtClean="0"/>
-              <a:t>28/08/2026</a:t>
+              <a:t>30/08/2026</a:t>
             </a:fld>
             <a:endParaRPr lang="en-DE"/>
           </a:p>
@@ -5435,7 +5517,7 @@
           <a:p>
             <a:fld id="{C4CA1AAD-5839-46A8-A174-C22752ADA508}" type="datetimeFigureOut">
               <a:rPr lang="en-DE" smtClean="0"/>
-              <a:t>28/08/2026</a:t>
+              <a:t>30/08/2026</a:t>
             </a:fld>
             <a:endParaRPr lang="en-DE"/>
           </a:p>
@@ -5553,7 +5635,7 @@
           <a:p>
             <a:fld id="{C4CA1AAD-5839-46A8-A174-C22752ADA508}" type="datetimeFigureOut">
               <a:rPr lang="en-DE" smtClean="0"/>
-              <a:t>28/08/2026</a:t>
+              <a:t>30/08/2026</a:t>
             </a:fld>
             <a:endParaRPr lang="en-DE"/>
           </a:p>
@@ -5648,7 +5730,7 @@
           <a:p>
             <a:fld id="{C4CA1AAD-5839-46A8-A174-C22752ADA508}" type="datetimeFigureOut">
               <a:rPr lang="en-DE" smtClean="0"/>
-              <a:t>28/08/2026</a:t>
+              <a:t>30/08/2026</a:t>
             </a:fld>
             <a:endParaRPr lang="en-DE"/>
           </a:p>
@@ -5927,7 +6009,7 @@
           <a:p>
             <a:fld id="{C4CA1AAD-5839-46A8-A174-C22752ADA508}" type="datetimeFigureOut">
               <a:rPr lang="en-DE" smtClean="0"/>
-              <a:t>28/08/2026</a:t>
+              <a:t>30/08/2026</a:t>
             </a:fld>
             <a:endParaRPr lang="en-DE"/>
           </a:p>
@@ -6202,7 +6284,7 @@
           <a:p>
             <a:fld id="{C4CA1AAD-5839-46A8-A174-C22752ADA508}" type="datetimeFigureOut">
               <a:rPr lang="en-DE" smtClean="0"/>
-              <a:t>28/08/2026</a:t>
+              <a:t>30/08/2026</a:t>
             </a:fld>
             <a:endParaRPr lang="en-DE"/>
           </a:p>
@@ -6645,7 +6727,7 @@
           <a:p>
             <a:fld id="{C4CA1AAD-5839-46A8-A174-C22752ADA508}" type="datetimeFigureOut">
               <a:rPr lang="en-DE" smtClean="0"/>
-              <a:t>28/08/2026</a:t>
+              <a:t>30/08/2026</a:t>
             </a:fld>
             <a:endParaRPr lang="en-DE"/>
           </a:p>
@@ -8613,6 +8695,278 @@
     <p:extLst>
       <p:ext uri="{BB962C8B-B14F-4D97-AF65-F5344CB8AC3E}">
         <p14:creationId xmlns:p14="http://schemas.microsoft.com/office/powerpoint/2010/main" val="580827076"/>
+      </p:ext>
+    </p:extLst>
+  </p:cSld>
+  <p:clrMapOvr>
+    <a:masterClrMapping/>
+  </p:clrMapOvr>
+</p:sld>
+</file>
+
+<file path=ppt/slides/slide6.xml><?xml version="1.0" encoding="utf-8"?>
+<p:sld xmlns:a="http://schemas.openxmlformats.org/drawingml/2006/main" xmlns:r="http://schemas.openxmlformats.org/officeDocument/2006/relationships" xmlns:p="http://schemas.openxmlformats.org/presentationml/2006/main">
+  <p:cSld>
+    <p:spTree>
+      <p:nvGrpSpPr>
+        <p:cNvPr id="1" name=""/>
+        <p:cNvGrpSpPr/>
+        <p:nvPr/>
+      </p:nvGrpSpPr>
+      <p:grpSpPr>
+        <a:xfrm>
+          <a:off x="0" y="0"/>
+          <a:ext cx="0" cy="0"/>
+          <a:chOff x="0" y="0"/>
+          <a:chExt cx="0" cy="0"/>
+        </a:xfrm>
+      </p:grpSpPr>
+      <p:sp>
+        <p:nvSpPr>
+          <p:cNvPr id="2" name="Tiêu đề 1">
+            <a:extLst>
+              <a:ext uri="{FF2B5EF4-FFF2-40B4-BE49-F238E27FC236}">
+                <a16:creationId xmlns:a16="http://schemas.microsoft.com/office/drawing/2014/main" id="{142DA35F-12C4-BE7E-6477-49B0DF926E2B}"/>
+              </a:ext>
+            </a:extLst>
+          </p:cNvPr>
+          <p:cNvSpPr>
+            <a:spLocks noGrp="1"/>
+          </p:cNvSpPr>
+          <p:nvPr>
+            <p:ph type="title"/>
+          </p:nvPr>
+        </p:nvSpPr>
+        <p:spPr/>
+        <p:txBody>
+          <a:bodyPr/>
+          <a:lstStyle/>
+          <a:p>
+            <a:r>
+              <a:rPr lang="en-US" dirty="0"/>
+              <a:t>4.Final Result</a:t>
+            </a:r>
+            <a:endParaRPr lang="en-DE" dirty="0"/>
+          </a:p>
+        </p:txBody>
+      </p:sp>
+      <p:pic>
+        <p:nvPicPr>
+          <p:cNvPr id="5" name="Hình ảnh 4">
+            <a:extLst>
+              <a:ext uri="{FF2B5EF4-FFF2-40B4-BE49-F238E27FC236}">
+                <a16:creationId xmlns:a16="http://schemas.microsoft.com/office/drawing/2014/main" id="{582E289E-F84D-9EF5-1ABA-EAFE82778758}"/>
+              </a:ext>
+            </a:extLst>
+          </p:cNvPr>
+          <p:cNvPicPr>
+            <a:picLocks noChangeAspect="1"/>
+          </p:cNvPicPr>
+          <p:nvPr/>
+        </p:nvPicPr>
+        <p:blipFill>
+          <a:blip r:embed="rId3"/>
+          <a:stretch>
+            <a:fillRect/>
+          </a:stretch>
+        </p:blipFill>
+        <p:spPr>
+          <a:xfrm>
+            <a:off x="5607050" y="1454150"/>
+            <a:ext cx="5731510" cy="2882900"/>
+          </a:xfrm>
+          <a:prstGeom prst="rect">
+            <a:avLst/>
+          </a:prstGeom>
+        </p:spPr>
+      </p:pic>
+      <p:sp>
+        <p:nvSpPr>
+          <p:cNvPr id="7" name="Hộp Văn bản 6">
+            <a:extLst>
+              <a:ext uri="{FF2B5EF4-FFF2-40B4-BE49-F238E27FC236}">
+                <a16:creationId xmlns:a16="http://schemas.microsoft.com/office/drawing/2014/main" id="{B2962CC4-9181-0BD7-610F-0D5B7AC5D175}"/>
+              </a:ext>
+            </a:extLst>
+          </p:cNvPr>
+          <p:cNvSpPr txBox="1"/>
+          <p:nvPr/>
+        </p:nvSpPr>
+        <p:spPr>
+          <a:xfrm>
+            <a:off x="7684450" y="4557682"/>
+            <a:ext cx="4507550" cy="276999"/>
+          </a:xfrm>
+          <a:prstGeom prst="rect">
+            <a:avLst/>
+          </a:prstGeom>
+          <a:noFill/>
+        </p:spPr>
+        <p:txBody>
+          <a:bodyPr wrap="square">
+            <a:spAutoFit/>
+          </a:bodyPr>
+          <a:lstStyle/>
+          <a:p>
+            <a:r>
+              <a:rPr lang="en-US" sz="1200" dirty="0"/>
+              <a:t>Figure 6:final Result</a:t>
+            </a:r>
+            <a:endParaRPr lang="en-DE" sz="1200" dirty="0"/>
+          </a:p>
+        </p:txBody>
+      </p:sp>
+      <p:sp>
+        <p:nvSpPr>
+          <p:cNvPr id="8" name="Hộp Văn bản 7">
+            <a:extLst>
+              <a:ext uri="{FF2B5EF4-FFF2-40B4-BE49-F238E27FC236}">
+                <a16:creationId xmlns:a16="http://schemas.microsoft.com/office/drawing/2014/main" id="{EDF0BE02-EDC8-D006-A364-6A930EDFBAE1}"/>
+              </a:ext>
+            </a:extLst>
+          </p:cNvPr>
+          <p:cNvSpPr txBox="1"/>
+          <p:nvPr/>
+        </p:nvSpPr>
+        <p:spPr>
+          <a:xfrm>
+            <a:off x="822960" y="1760220"/>
+            <a:ext cx="4624984" cy="2862322"/>
+          </a:xfrm>
+          <a:prstGeom prst="rect">
+            <a:avLst/>
+          </a:prstGeom>
+          <a:noFill/>
+        </p:spPr>
+        <p:txBody>
+          <a:bodyPr wrap="none" rtlCol="0">
+            <a:spAutoFit/>
+          </a:bodyPr>
+          <a:lstStyle/>
+          <a:p>
+            <a:pPr marL="285750" indent="-285750">
+              <a:buFontTx/>
+              <a:buChar char="-"/>
+            </a:pPr>
+            <a:r>
+              <a:rPr lang="en-US" dirty="0"/>
+              <a:t>4 suitable areas</a:t>
+            </a:r>
+          </a:p>
+          <a:p>
+            <a:pPr marL="285750" indent="-285750">
+              <a:buFontTx/>
+              <a:buChar char="-"/>
+            </a:pPr>
+            <a:r>
+              <a:rPr lang="en-US" dirty="0"/>
+              <a:t>Total area: 90,93 ha</a:t>
+            </a:r>
+          </a:p>
+          <a:p>
+            <a:pPr marL="285750" indent="-285750">
+              <a:buFontTx/>
+              <a:buChar char="-"/>
+            </a:pPr>
+            <a:r>
+              <a:rPr lang="en-US" dirty="0"/>
+              <a:t>I</a:t>
+            </a:r>
+            <a:r>
+              <a:rPr lang="en-DE" dirty="0" err="1"/>
+              <a:t>ndividual</a:t>
+            </a:r>
+            <a:r>
+              <a:rPr lang="en-DE" dirty="0"/>
+              <a:t> areas</a:t>
+            </a:r>
+            <a:r>
+              <a:rPr lang="en-US" dirty="0"/>
+              <a:t>: from 18.5 to 29,96</a:t>
+            </a:r>
+          </a:p>
+          <a:p>
+            <a:pPr marL="285750" indent="-285750">
+              <a:buFontTx/>
+              <a:buChar char="-"/>
+            </a:pPr>
+            <a:r>
+              <a:rPr lang="en-US" dirty="0"/>
+              <a:t>T</a:t>
+            </a:r>
+            <a:r>
+              <a:rPr lang="en-DE" dirty="0"/>
+              <a:t>he suitable areas are concentrated </a:t>
+            </a:r>
+            <a:endParaRPr lang="en-US" dirty="0"/>
+          </a:p>
+          <a:p>
+            <a:r>
+              <a:rPr lang="en-DE" dirty="0"/>
+              <a:t>mainly in the </a:t>
+            </a:r>
+            <a:r>
+              <a:rPr lang="en-DE" b="1" dirty="0"/>
+              <a:t>western and southwestern</a:t>
+            </a:r>
+            <a:endParaRPr lang="en-US" b="1" dirty="0"/>
+          </a:p>
+          <a:p>
+            <a:r>
+              <a:rPr lang="en-US" b="1" dirty="0"/>
+              <a:t>Reason: </a:t>
+            </a:r>
+            <a:r>
+              <a:rPr lang="en-DE" dirty="0"/>
+              <a:t>high density of settlements</a:t>
+            </a:r>
+            <a:r>
+              <a:rPr lang="en-US" dirty="0"/>
+              <a:t>,</a:t>
+            </a:r>
+          </a:p>
+          <a:p>
+            <a:r>
+              <a:rPr lang="en-US" dirty="0"/>
+              <a:t>		</a:t>
+            </a:r>
+            <a:r>
+              <a:rPr lang="en-DE" dirty="0"/>
+              <a:t>, transport infrastructure</a:t>
+            </a:r>
+            <a:endParaRPr lang="en-US" dirty="0"/>
+          </a:p>
+          <a:p>
+            <a:r>
+              <a:rPr lang="en-US" dirty="0"/>
+              <a:t>		</a:t>
+            </a:r>
+            <a:r>
+              <a:rPr lang="en-DE" dirty="0"/>
+              <a:t>, water bodies</a:t>
+            </a:r>
+            <a:endParaRPr lang="en-US" dirty="0"/>
+          </a:p>
+          <a:p>
+            <a:pPr marL="285750" indent="-285750">
+              <a:buFontTx/>
+              <a:buChar char="-"/>
+            </a:pPr>
+            <a:endParaRPr lang="en-US" dirty="0"/>
+          </a:p>
+          <a:p>
+            <a:pPr marL="285750" indent="-285750">
+              <a:buFontTx/>
+              <a:buChar char="-"/>
+            </a:pPr>
+            <a:endParaRPr lang="en-DE" dirty="0"/>
+          </a:p>
+        </p:txBody>
+      </p:sp>
+    </p:spTree>
+    <p:extLst>
+      <p:ext uri="{BB962C8B-B14F-4D97-AF65-F5344CB8AC3E}">
+        <p14:creationId xmlns:p14="http://schemas.microsoft.com/office/powerpoint/2010/main" val="2347941873"/>
       </p:ext>
     </p:extLst>
   </p:cSld>
